--- a/Presentations/Presentation4.pptx
+++ b/Presentations/Presentation4.pptx
@@ -14,6 +14,10 @@
     <p:sldId id="262" r:id="rId8"/>
     <p:sldId id="263" r:id="rId9"/>
     <p:sldId id="264" r:id="rId10"/>
+    <p:sldId id="265" r:id="rId11"/>
+    <p:sldId id="269" r:id="rId12"/>
+    <p:sldId id="267" r:id="rId13"/>
+    <p:sldId id="268" r:id="rId14"/>
   </p:sldIdLst>
   <p:sldSz cx="12192000" cy="6858000"/>
   <p:notesSz cx="6858000" cy="9144000"/>
@@ -112,6 +116,11 @@
       </a:defRPr>
     </a:lvl9pPr>
   </p:defaultTextStyle>
+  <p:extLst>
+    <p:ext uri="{EFAFB233-063F-42B5-8137-9DF3F51BA10A}">
+      <p15:sldGuideLst xmlns:p15="http://schemas.microsoft.com/office/powerpoint/2012/main"/>
+    </p:ext>
+  </p:extLst>
 </p:presentation>
 </file>
 
@@ -12832,6 +12841,1887 @@
 </p:sld>
 </file>
 
+<file path=ppt/slides/slide10.xml><?xml version="1.0" encoding="utf-8"?>
+<p:sld xmlns:a="http://schemas.openxmlformats.org/drawingml/2006/main" xmlns:r="http://schemas.openxmlformats.org/officeDocument/2006/relationships" xmlns:p="http://schemas.openxmlformats.org/presentationml/2006/main">
+  <p:cSld>
+    <p:bg>
+      <p:bgPr>
+        <a:solidFill>
+          <a:schemeClr val="bg1"/>
+        </a:solidFill>
+        <a:effectLst/>
+      </p:bgPr>
+    </p:bg>
+    <p:spTree>
+      <p:nvGrpSpPr>
+        <p:cNvPr id="1" name=""/>
+        <p:cNvGrpSpPr/>
+        <p:nvPr/>
+      </p:nvGrpSpPr>
+      <p:grpSpPr>
+        <a:xfrm>
+          <a:off x="0" y="0"/>
+          <a:ext cx="0" cy="0"/>
+          <a:chOff x="0" y="0"/>
+          <a:chExt cx="0" cy="0"/>
+        </a:xfrm>
+      </p:grpSpPr>
+      <p:sp useBgFill="1">
+        <p:nvSpPr>
+          <p:cNvPr id="10" name="Rectangle 9">
+            <a:extLst>
+              <a:ext uri="{FF2B5EF4-FFF2-40B4-BE49-F238E27FC236}">
+                <a16:creationId xmlns:a16="http://schemas.microsoft.com/office/drawing/2014/main" id="{DBC6133C-0615-4CE4-9132-37E609A9BDFA}"/>
+              </a:ext>
+              <a:ext uri="{C183D7F6-B498-43B3-948B-1728B52AA6E4}">
+                <adec:decorative xmlns:adec="http://schemas.microsoft.com/office/drawing/2017/decorative" val="1"/>
+              </a:ext>
+            </a:extLst>
+          </p:cNvPr>
+          <p:cNvSpPr>
+            <a:spLocks noGrp="1" noRot="1" noChangeAspect="1" noMove="1" noResize="1" noEditPoints="1" noAdjustHandles="1" noChangeArrowheads="1" noChangeShapeType="1" noTextEdit="1"/>
+          </p:cNvSpPr>
+          <p:nvPr>
+            <p:extLst>
+              <p:ext uri="{386F3935-93C4-4BCD-93E2-E3B085C9AB24}">
+                <p16:designElem xmlns:p16="http://schemas.microsoft.com/office/powerpoint/2015/main" val="1"/>
+              </p:ext>
+            </p:extLst>
+          </p:nvPr>
+        </p:nvSpPr>
+        <p:spPr>
+          <a:xfrm>
+            <a:off x="0" y="0"/>
+            <a:ext cx="12191999" cy="6857365"/>
+          </a:xfrm>
+          <a:prstGeom prst="rect">
+            <a:avLst/>
+          </a:prstGeom>
+          <a:ln>
+            <a:noFill/>
+          </a:ln>
+        </p:spPr>
+        <p:style>
+          <a:lnRef idx="2">
+            <a:schemeClr val="accent1">
+              <a:shade val="50000"/>
+            </a:schemeClr>
+          </a:lnRef>
+          <a:fillRef idx="1">
+            <a:schemeClr val="accent1"/>
+          </a:fillRef>
+          <a:effectRef idx="0">
+            <a:schemeClr val="accent1"/>
+          </a:effectRef>
+          <a:fontRef idx="minor">
+            <a:schemeClr val="lt1"/>
+          </a:fontRef>
+        </p:style>
+        <p:txBody>
+          <a:bodyPr rtlCol="0" anchor="ctr"/>
+          <a:lstStyle/>
+          <a:p>
+            <a:pPr algn="ctr"/>
+            <a:endParaRPr lang="en-US"/>
+          </a:p>
+        </p:txBody>
+      </p:sp>
+      <p:sp>
+        <p:nvSpPr>
+          <p:cNvPr id="2" name="Title 1">
+            <a:extLst>
+              <a:ext uri="{FF2B5EF4-FFF2-40B4-BE49-F238E27FC236}">
+                <a16:creationId xmlns:a16="http://schemas.microsoft.com/office/drawing/2014/main" id="{5D1188EF-51D4-F355-B6BF-9B24DC2D6599}"/>
+              </a:ext>
+            </a:extLst>
+          </p:cNvPr>
+          <p:cNvSpPr>
+            <a:spLocks noGrp="1"/>
+          </p:cNvSpPr>
+          <p:nvPr>
+            <p:ph type="title"/>
+          </p:nvPr>
+        </p:nvSpPr>
+        <p:spPr>
+          <a:xfrm>
+            <a:off x="645064" y="525982"/>
+            <a:ext cx="4282983" cy="1200361"/>
+          </a:xfrm>
+        </p:spPr>
+        <p:txBody>
+          <a:bodyPr anchor="b">
+            <a:normAutofit/>
+          </a:bodyPr>
+          <a:lstStyle/>
+          <a:p>
+            <a:r>
+              <a:rPr lang="en-US" sz="3600"/>
+              <a:t>Additional Slides</a:t>
+            </a:r>
+          </a:p>
+        </p:txBody>
+      </p:sp>
+      <p:sp>
+        <p:nvSpPr>
+          <p:cNvPr id="12" name="Rectangle 11">
+            <a:extLst>
+              <a:ext uri="{FF2B5EF4-FFF2-40B4-BE49-F238E27FC236}">
+                <a16:creationId xmlns:a16="http://schemas.microsoft.com/office/drawing/2014/main" id="{169CC832-2974-4E8D-90ED-3E2941BA7336}"/>
+              </a:ext>
+              <a:ext uri="{C183D7F6-B498-43B3-948B-1728B52AA6E4}">
+                <adec:decorative xmlns:adec="http://schemas.microsoft.com/office/drawing/2017/decorative" val="1"/>
+              </a:ext>
+            </a:extLst>
+          </p:cNvPr>
+          <p:cNvSpPr>
+            <a:spLocks noGrp="1" noRot="1" noChangeAspect="1" noMove="1" noResize="1" noEditPoints="1" noAdjustHandles="1" noChangeArrowheads="1" noChangeShapeType="1" noTextEdit="1"/>
+          </p:cNvSpPr>
+          <p:nvPr>
+            <p:extLst>
+              <p:ext uri="{386F3935-93C4-4BCD-93E2-E3B085C9AB24}">
+                <p16:designElem xmlns:p16="http://schemas.microsoft.com/office/powerpoint/2015/main" val="1"/>
+              </p:ext>
+            </p:extLst>
+          </p:nvPr>
+        </p:nvSpPr>
+        <p:spPr>
+          <a:xfrm flipH="1">
+            <a:off x="616533" y="1944913"/>
+            <a:ext cx="4023360" cy="27432"/>
+          </a:xfrm>
+          <a:prstGeom prst="rect">
+            <a:avLst/>
+          </a:prstGeom>
+          <a:solidFill>
+            <a:schemeClr val="accent4"/>
+          </a:solidFill>
+          <a:ln>
+            <a:noFill/>
+          </a:ln>
+        </p:spPr>
+        <p:style>
+          <a:lnRef idx="2">
+            <a:schemeClr val="accent1">
+              <a:shade val="50000"/>
+            </a:schemeClr>
+          </a:lnRef>
+          <a:fillRef idx="1">
+            <a:schemeClr val="accent1"/>
+          </a:fillRef>
+          <a:effectRef idx="0">
+            <a:schemeClr val="accent1"/>
+          </a:effectRef>
+          <a:fontRef idx="minor">
+            <a:schemeClr val="lt1"/>
+          </a:fontRef>
+        </p:style>
+        <p:txBody>
+          <a:bodyPr rtlCol="0" anchor="ctr"/>
+          <a:lstStyle/>
+          <a:p>
+            <a:pPr algn="ctr"/>
+            <a:endParaRPr lang="en-US"/>
+          </a:p>
+        </p:txBody>
+      </p:sp>
+      <p:sp>
+        <p:nvSpPr>
+          <p:cNvPr id="3" name="Content Placeholder 2">
+            <a:extLst>
+              <a:ext uri="{FF2B5EF4-FFF2-40B4-BE49-F238E27FC236}">
+                <a16:creationId xmlns:a16="http://schemas.microsoft.com/office/drawing/2014/main" id="{4775481F-0973-2A9F-0F64-536568BF5E73}"/>
+              </a:ext>
+            </a:extLst>
+          </p:cNvPr>
+          <p:cNvSpPr>
+            <a:spLocks noGrp="1"/>
+          </p:cNvSpPr>
+          <p:nvPr>
+            <p:ph idx="1"/>
+          </p:nvPr>
+        </p:nvSpPr>
+        <p:spPr>
+          <a:xfrm>
+            <a:off x="645066" y="2031101"/>
+            <a:ext cx="4282984" cy="3511943"/>
+          </a:xfrm>
+        </p:spPr>
+        <p:txBody>
+          <a:bodyPr anchor="ctr">
+            <a:normAutofit/>
+          </a:bodyPr>
+          <a:lstStyle/>
+          <a:p>
+            <a:r>
+              <a:rPr lang="en-IN" dirty="0"/>
+              <a:t>Install Hyper-V</a:t>
+            </a:r>
+          </a:p>
+          <a:p>
+            <a:r>
+              <a:rPr lang="en-IN" dirty="0"/>
+              <a:t>Oracle VM VirtualBox</a:t>
+            </a:r>
+          </a:p>
+          <a:p>
+            <a:r>
+              <a:rPr lang="en-IN" dirty="0"/>
+              <a:t>Citrix </a:t>
+            </a:r>
+            <a:r>
+              <a:rPr lang="en-IN" dirty="0" err="1"/>
+              <a:t>XenServer</a:t>
+            </a:r>
+            <a:endParaRPr lang="en-IN" dirty="0"/>
+          </a:p>
+          <a:p>
+            <a:endParaRPr lang="en-IN" sz="1800" b="1" dirty="0"/>
+          </a:p>
+          <a:p>
+            <a:endParaRPr lang="en-US" sz="1800" dirty="0"/>
+          </a:p>
+        </p:txBody>
+      </p:sp>
+      <p:sp>
+        <p:nvSpPr>
+          <p:cNvPr id="14" name="Rectangle 13">
+            <a:extLst>
+              <a:ext uri="{FF2B5EF4-FFF2-40B4-BE49-F238E27FC236}">
+                <a16:creationId xmlns:a16="http://schemas.microsoft.com/office/drawing/2014/main" id="{55222F96-971A-4F90-B841-6BAB416C7AC1}"/>
+              </a:ext>
+              <a:ext uri="{C183D7F6-B498-43B3-948B-1728B52AA6E4}">
+                <adec:decorative xmlns:adec="http://schemas.microsoft.com/office/drawing/2017/decorative" val="1"/>
+              </a:ext>
+            </a:extLst>
+          </p:cNvPr>
+          <p:cNvSpPr>
+            <a:spLocks noGrp="1" noRot="1" noChangeAspect="1" noMove="1" noResize="1" noEditPoints="1" noAdjustHandles="1" noChangeArrowheads="1" noChangeShapeType="1" noTextEdit="1"/>
+          </p:cNvSpPr>
+          <p:nvPr>
+            <p:extLst>
+              <p:ext uri="{386F3935-93C4-4BCD-93E2-E3B085C9AB24}">
+                <p16:designElem xmlns:p16="http://schemas.microsoft.com/office/powerpoint/2015/main" val="1"/>
+              </p:ext>
+            </p:extLst>
+          </p:nvPr>
+        </p:nvSpPr>
+        <p:spPr>
+          <a:xfrm rot="5400000">
+            <a:off x="-225843" y="6053360"/>
+            <a:ext cx="740664" cy="154124"/>
+          </a:xfrm>
+          <a:prstGeom prst="rect">
+            <a:avLst/>
+          </a:prstGeom>
+          <a:solidFill>
+            <a:schemeClr val="accent4"/>
+          </a:solidFill>
+          <a:ln>
+            <a:noFill/>
+          </a:ln>
+        </p:spPr>
+        <p:style>
+          <a:lnRef idx="2">
+            <a:schemeClr val="accent1">
+              <a:shade val="50000"/>
+            </a:schemeClr>
+          </a:lnRef>
+          <a:fillRef idx="1">
+            <a:schemeClr val="accent1"/>
+          </a:fillRef>
+          <a:effectRef idx="0">
+            <a:schemeClr val="accent1"/>
+          </a:effectRef>
+          <a:fontRef idx="minor">
+            <a:schemeClr val="lt1"/>
+          </a:fontRef>
+        </p:style>
+        <p:txBody>
+          <a:bodyPr rtlCol="0" anchor="ctr"/>
+          <a:lstStyle/>
+          <a:p>
+            <a:pPr algn="ctr"/>
+            <a:endParaRPr lang="en-US"/>
+          </a:p>
+        </p:txBody>
+      </p:sp>
+      <p:sp>
+        <p:nvSpPr>
+          <p:cNvPr id="16" name="Rectangle 15">
+            <a:extLst>
+              <a:ext uri="{FF2B5EF4-FFF2-40B4-BE49-F238E27FC236}">
+                <a16:creationId xmlns:a16="http://schemas.microsoft.com/office/drawing/2014/main" id="{08980754-6F4B-43C9-B9BE-127B6BED6586}"/>
+              </a:ext>
+              <a:ext uri="{C183D7F6-B498-43B3-948B-1728B52AA6E4}">
+                <adec:decorative xmlns:adec="http://schemas.microsoft.com/office/drawing/2017/decorative" val="1"/>
+              </a:ext>
+            </a:extLst>
+          </p:cNvPr>
+          <p:cNvSpPr>
+            <a:spLocks noGrp="1" noRot="1" noChangeAspect="1" noMove="1" noResize="1" noEditPoints="1" noAdjustHandles="1" noChangeArrowheads="1" noChangeShapeType="1" noTextEdit="1"/>
+          </p:cNvSpPr>
+          <p:nvPr>
+            <p:extLst>
+              <p:ext uri="{386F3935-93C4-4BCD-93E2-E3B085C9AB24}">
+                <p16:designElem xmlns:p16="http://schemas.microsoft.com/office/powerpoint/2015/main" val="1"/>
+              </p:ext>
+            </p:extLst>
+          </p:nvPr>
+        </p:nvSpPr>
+        <p:spPr>
+          <a:xfrm rot="5400000">
+            <a:off x="5904923" y="215201"/>
+            <a:ext cx="740664" cy="11833491"/>
+          </a:xfrm>
+          <a:prstGeom prst="rect">
+            <a:avLst/>
+          </a:prstGeom>
+          <a:solidFill>
+            <a:schemeClr val="accent4"/>
+          </a:solidFill>
+          <a:ln>
+            <a:noFill/>
+          </a:ln>
+        </p:spPr>
+        <p:style>
+          <a:lnRef idx="2">
+            <a:schemeClr val="accent1">
+              <a:shade val="50000"/>
+            </a:schemeClr>
+          </a:lnRef>
+          <a:fillRef idx="1">
+            <a:schemeClr val="accent1"/>
+          </a:fillRef>
+          <a:effectRef idx="0">
+            <a:schemeClr val="accent1"/>
+          </a:effectRef>
+          <a:fontRef idx="minor">
+            <a:schemeClr val="lt1"/>
+          </a:fontRef>
+        </p:style>
+        <p:txBody>
+          <a:bodyPr rtlCol="0" anchor="ctr"/>
+          <a:lstStyle/>
+          <a:p>
+            <a:pPr algn="ctr"/>
+            <a:endParaRPr lang="en-US"/>
+          </a:p>
+        </p:txBody>
+      </p:sp>
+      <p:sp>
+        <p:nvSpPr>
+          <p:cNvPr id="18" name="Rectangle 17">
+            <a:extLst>
+              <a:ext uri="{FF2B5EF4-FFF2-40B4-BE49-F238E27FC236}">
+                <a16:creationId xmlns:a16="http://schemas.microsoft.com/office/drawing/2014/main" id="{2C1BBA94-3F40-40AA-8BB9-E69E25E537C1}"/>
+              </a:ext>
+              <a:ext uri="{C183D7F6-B498-43B3-948B-1728B52AA6E4}">
+                <adec:decorative xmlns:adec="http://schemas.microsoft.com/office/drawing/2017/decorative" val="1"/>
+              </a:ext>
+            </a:extLst>
+          </p:cNvPr>
+          <p:cNvSpPr>
+            <a:spLocks noGrp="1" noRot="1" noChangeAspect="1" noMove="1" noResize="1" noEditPoints="1" noAdjustHandles="1" noChangeArrowheads="1" noChangeShapeType="1" noTextEdit="1"/>
+          </p:cNvSpPr>
+          <p:nvPr>
+            <p:extLst>
+              <p:ext uri="{386F3935-93C4-4BCD-93E2-E3B085C9AB24}">
+                <p16:designElem xmlns:p16="http://schemas.microsoft.com/office/powerpoint/2015/main" val="1"/>
+              </p:ext>
+            </p:extLst>
+          </p:nvPr>
+        </p:nvSpPr>
+        <p:spPr>
+          <a:xfrm>
+            <a:off x="5696793" y="354959"/>
+            <a:ext cx="6184973" cy="5915212"/>
+          </a:xfrm>
+          <a:prstGeom prst="rect">
+            <a:avLst/>
+          </a:prstGeom>
+          <a:solidFill>
+            <a:schemeClr val="bg1"/>
+          </a:solidFill>
+          <a:ln>
+            <a:noFill/>
+          </a:ln>
+          <a:effectLst>
+            <a:outerShdw blurRad="139700" dist="127000" dir="5400000" algn="t" rotWithShape="0">
+              <a:prstClr val="black">
+                <a:alpha val="15000"/>
+              </a:prstClr>
+            </a:outerShdw>
+          </a:effectLst>
+        </p:spPr>
+        <p:style>
+          <a:lnRef idx="2">
+            <a:schemeClr val="accent1">
+              <a:shade val="50000"/>
+            </a:schemeClr>
+          </a:lnRef>
+          <a:fillRef idx="1">
+            <a:schemeClr val="accent1"/>
+          </a:fillRef>
+          <a:effectRef idx="0">
+            <a:schemeClr val="accent1"/>
+          </a:effectRef>
+          <a:fontRef idx="minor">
+            <a:schemeClr val="lt1"/>
+          </a:fontRef>
+        </p:style>
+        <p:txBody>
+          <a:bodyPr rtlCol="0" anchor="ctr"/>
+          <a:lstStyle/>
+          <a:p>
+            <a:pPr algn="ctr"/>
+            <a:endParaRPr lang="en-US"/>
+          </a:p>
+        </p:txBody>
+      </p:sp>
+      <p:pic>
+        <p:nvPicPr>
+          <p:cNvPr id="7" name="Graphic 6" descr="Download">
+            <a:extLst>
+              <a:ext uri="{FF2B5EF4-FFF2-40B4-BE49-F238E27FC236}">
+                <a16:creationId xmlns:a16="http://schemas.microsoft.com/office/drawing/2014/main" id="{96937A85-A1C0-1402-8572-9F1252DE87A2}"/>
+              </a:ext>
+            </a:extLst>
+          </p:cNvPr>
+          <p:cNvPicPr>
+            <a:picLocks noChangeAspect="1"/>
+          </p:cNvPicPr>
+          <p:nvPr/>
+        </p:nvPicPr>
+        <p:blipFill>
+          <a:blip>
+            <a:extLst>
+              <a:ext uri="{28A0092B-C50C-407E-A947-70E740481C1C}">
+                <a14:useLocalDpi xmlns:a14="http://schemas.microsoft.com/office/drawing/2010/main" val="0"/>
+              </a:ext>
+              <a:ext uri="{96DAC541-7B7A-43D3-8B79-37D633B846F1}">
+                <asvg:svgBlip xmlns:asvg="http://schemas.microsoft.com/office/drawing/2016/SVG/main" r:embed="rId2"/>
+              </a:ext>
+            </a:extLst>
+          </a:blip>
+          <a:stretch>
+            <a:fillRect/>
+          </a:stretch>
+        </p:blipFill>
+        <p:spPr>
+          <a:xfrm>
+            <a:off x="6139676" y="650494"/>
+            <a:ext cx="5324142" cy="5324142"/>
+          </a:xfrm>
+          <a:prstGeom prst="rect">
+            <a:avLst/>
+          </a:prstGeom>
+        </p:spPr>
+      </p:pic>
+    </p:spTree>
+    <p:extLst>
+      <p:ext uri="{BB962C8B-B14F-4D97-AF65-F5344CB8AC3E}">
+        <p14:creationId xmlns:p14="http://schemas.microsoft.com/office/powerpoint/2010/main" val="2790398179"/>
+      </p:ext>
+    </p:extLst>
+  </p:cSld>
+  <p:clrMapOvr>
+    <a:masterClrMapping/>
+  </p:clrMapOvr>
+</p:sld>
+</file>
+
+<file path=ppt/slides/slide11.xml><?xml version="1.0" encoding="utf-8"?>
+<p:sld xmlns:a="http://schemas.openxmlformats.org/drawingml/2006/main" xmlns:r="http://schemas.openxmlformats.org/officeDocument/2006/relationships" xmlns:p="http://schemas.openxmlformats.org/presentationml/2006/main">
+  <p:cSld>
+    <p:bg>
+      <p:bgPr>
+        <a:solidFill>
+          <a:schemeClr val="bg1"/>
+        </a:solidFill>
+        <a:effectLst/>
+      </p:bgPr>
+    </p:bg>
+    <p:spTree>
+      <p:nvGrpSpPr>
+        <p:cNvPr id="1" name="">
+          <a:extLst>
+            <a:ext uri="{FF2B5EF4-FFF2-40B4-BE49-F238E27FC236}">
+              <a16:creationId xmlns:a16="http://schemas.microsoft.com/office/drawing/2014/main" id="{9EB57F64-CB4C-060A-74A8-BA6847C9E6E1}"/>
+            </a:ext>
+          </a:extLst>
+        </p:cNvPr>
+        <p:cNvGrpSpPr/>
+        <p:nvPr/>
+      </p:nvGrpSpPr>
+      <p:grpSpPr>
+        <a:xfrm>
+          <a:off x="0" y="0"/>
+          <a:ext cx="0" cy="0"/>
+          <a:chOff x="0" y="0"/>
+          <a:chExt cx="0" cy="0"/>
+        </a:xfrm>
+      </p:grpSpPr>
+      <p:sp useBgFill="1">
+        <p:nvSpPr>
+          <p:cNvPr id="19" name="Rectangle 18">
+            <a:extLst>
+              <a:ext uri="{FF2B5EF4-FFF2-40B4-BE49-F238E27FC236}">
+                <a16:creationId xmlns:a16="http://schemas.microsoft.com/office/drawing/2014/main" id="{D3EF3CAD-CC20-1B11-9FED-E2820856EFCB}"/>
+              </a:ext>
+              <a:ext uri="{C183D7F6-B498-43B3-948B-1728B52AA6E4}">
+                <adec:decorative xmlns:adec="http://schemas.microsoft.com/office/drawing/2017/decorative" val="1"/>
+              </a:ext>
+            </a:extLst>
+          </p:cNvPr>
+          <p:cNvSpPr>
+            <a:spLocks noGrp="1" noRot="1" noChangeAspect="1" noMove="1" noResize="1" noEditPoints="1" noAdjustHandles="1" noChangeArrowheads="1" noChangeShapeType="1" noTextEdit="1"/>
+          </p:cNvSpPr>
+          <p:nvPr>
+            <p:extLst>
+              <p:ext uri="{386F3935-93C4-4BCD-93E2-E3B085C9AB24}">
+                <p16:designElem xmlns:p16="http://schemas.microsoft.com/office/powerpoint/2015/main" val="1"/>
+              </p:ext>
+            </p:extLst>
+          </p:nvPr>
+        </p:nvSpPr>
+        <p:spPr>
+          <a:xfrm>
+            <a:off x="0" y="0"/>
+            <a:ext cx="12191999" cy="6857365"/>
+          </a:xfrm>
+          <a:prstGeom prst="rect">
+            <a:avLst/>
+          </a:prstGeom>
+          <a:ln>
+            <a:noFill/>
+          </a:ln>
+        </p:spPr>
+        <p:style>
+          <a:lnRef idx="2">
+            <a:schemeClr val="accent1">
+              <a:shade val="50000"/>
+            </a:schemeClr>
+          </a:lnRef>
+          <a:fillRef idx="1">
+            <a:schemeClr val="accent1"/>
+          </a:fillRef>
+          <a:effectRef idx="0">
+            <a:schemeClr val="accent1"/>
+          </a:effectRef>
+          <a:fontRef idx="minor">
+            <a:schemeClr val="lt1"/>
+          </a:fontRef>
+        </p:style>
+        <p:txBody>
+          <a:bodyPr rtlCol="0" anchor="ctr"/>
+          <a:lstStyle/>
+          <a:p>
+            <a:pPr algn="ctr"/>
+            <a:endParaRPr lang="en-US"/>
+          </a:p>
+        </p:txBody>
+      </p:sp>
+      <p:sp>
+        <p:nvSpPr>
+          <p:cNvPr id="2" name="Title 1">
+            <a:extLst>
+              <a:ext uri="{FF2B5EF4-FFF2-40B4-BE49-F238E27FC236}">
+                <a16:creationId xmlns:a16="http://schemas.microsoft.com/office/drawing/2014/main" id="{E05FF15B-662A-B5BB-D3EF-FC774FFF17CE}"/>
+              </a:ext>
+            </a:extLst>
+          </p:cNvPr>
+          <p:cNvSpPr>
+            <a:spLocks noGrp="1"/>
+          </p:cNvSpPr>
+          <p:nvPr>
+            <p:ph type="title"/>
+          </p:nvPr>
+        </p:nvSpPr>
+        <p:spPr>
+          <a:xfrm>
+            <a:off x="645065" y="1463040"/>
+            <a:ext cx="3796306" cy="2690949"/>
+          </a:xfrm>
+        </p:spPr>
+        <p:txBody>
+          <a:bodyPr vert="horz" lIns="91440" tIns="45720" rIns="91440" bIns="45720" rtlCol="0" anchor="t">
+            <a:normAutofit/>
+          </a:bodyPr>
+          <a:lstStyle/>
+          <a:p>
+            <a:r>
+              <a:rPr lang="en-US" sz="4800" dirty="0"/>
+              <a:t>Install Hyper-</a:t>
+            </a:r>
+            <a:r>
+              <a:rPr lang="en-US" sz="4800" dirty="0" err="1"/>
+              <a:t>VInstall</a:t>
+            </a:r>
+            <a:r>
+              <a:rPr lang="en-US" sz="4800" dirty="0"/>
+              <a:t> Hyper-V</a:t>
+            </a:r>
+          </a:p>
+        </p:txBody>
+      </p:sp>
+      <p:grpSp>
+        <p:nvGrpSpPr>
+          <p:cNvPr id="21" name="Group 20">
+            <a:extLst>
+              <a:ext uri="{FF2B5EF4-FFF2-40B4-BE49-F238E27FC236}">
+                <a16:creationId xmlns:a16="http://schemas.microsoft.com/office/drawing/2014/main" id="{9F0F1959-5581-F443-B9E6-09C81FB1B544}"/>
+              </a:ext>
+              <a:ext uri="{C183D7F6-B498-43B3-948B-1728B52AA6E4}">
+                <adec:decorative xmlns:adec="http://schemas.microsoft.com/office/drawing/2017/decorative" val="1"/>
+              </a:ext>
+            </a:extLst>
+          </p:cNvPr>
+          <p:cNvGrpSpPr>
+            <a:grpSpLocks noGrp="1" noUngrp="1" noRot="1" noChangeAspect="1" noMove="1" noResize="1"/>
+          </p:cNvGrpSpPr>
+          <p:nvPr>
+            <p:extLst>
+              <p:ext uri="{386F3935-93C4-4BCD-93E2-E3B085C9AB24}">
+                <p16:designElem xmlns:p16="http://schemas.microsoft.com/office/powerpoint/2015/main" val="1"/>
+              </p:ext>
+            </p:extLst>
+          </p:nvPr>
+        </p:nvGrpSpPr>
+        <p:grpSpPr>
+          <a:xfrm>
+            <a:off x="209667" y="4415246"/>
+            <a:ext cx="11982332" cy="2087795"/>
+            <a:chOff x="143163" y="5763486"/>
+            <a:chExt cx="11982332" cy="739555"/>
+          </a:xfrm>
+        </p:grpSpPr>
+        <p:sp>
+          <p:nvSpPr>
+            <p:cNvPr id="22" name="Rectangle 21">
+              <a:extLst>
+                <a:ext uri="{FF2B5EF4-FFF2-40B4-BE49-F238E27FC236}">
+                  <a16:creationId xmlns:a16="http://schemas.microsoft.com/office/drawing/2014/main" id="{D82C467A-7121-BA14-EA52-813DEF86DA00}"/>
+                </a:ext>
+                <a:ext uri="{C183D7F6-B498-43B3-948B-1728B52AA6E4}">
+                  <adec:decorative xmlns:adec="http://schemas.microsoft.com/office/drawing/2017/decorative" val="1"/>
+                </a:ext>
+              </a:extLst>
+            </p:cNvPr>
+            <p:cNvSpPr/>
+            <p:nvPr>
+              <p:extLst>
+                <p:ext uri="{386F3935-93C4-4BCD-93E2-E3B085C9AB24}">
+                  <p16:designElem xmlns:p16="http://schemas.microsoft.com/office/powerpoint/2015/main" val="1"/>
+                </p:ext>
+              </p:extLst>
+            </p:nvPr>
+          </p:nvSpPr>
+          <p:spPr>
+            <a:xfrm flipH="1" flipV="1">
+              <a:off x="357444" y="5763486"/>
+              <a:ext cx="11768051" cy="739555"/>
+            </a:xfrm>
+            <a:prstGeom prst="rect">
+              <a:avLst/>
+            </a:prstGeom>
+            <a:solidFill>
+              <a:schemeClr val="accent4"/>
+            </a:solidFill>
+            <a:ln>
+              <a:noFill/>
+            </a:ln>
+          </p:spPr>
+          <p:style>
+            <a:lnRef idx="2">
+              <a:schemeClr val="accent1">
+                <a:shade val="50000"/>
+              </a:schemeClr>
+            </a:lnRef>
+            <a:fillRef idx="1">
+              <a:schemeClr val="accent1"/>
+            </a:fillRef>
+            <a:effectRef idx="0">
+              <a:schemeClr val="accent1"/>
+            </a:effectRef>
+            <a:fontRef idx="minor">
+              <a:schemeClr val="lt1"/>
+            </a:fontRef>
+          </p:style>
+          <p:txBody>
+            <a:bodyPr rtlCol="0" anchor="ctr"/>
+            <a:lstStyle/>
+            <a:p>
+              <a:pPr algn="ctr"/>
+              <a:endParaRPr lang="en-US"/>
+            </a:p>
+          </p:txBody>
+        </p:sp>
+        <p:cxnSp>
+          <p:nvCxnSpPr>
+            <p:cNvPr id="23" name="Straight Connector 22">
+              <a:extLst>
+                <a:ext uri="{FF2B5EF4-FFF2-40B4-BE49-F238E27FC236}">
+                  <a16:creationId xmlns:a16="http://schemas.microsoft.com/office/drawing/2014/main" id="{0BBD6FC5-36C0-6A2D-2D7D-AD82BF65D20D}"/>
+                </a:ext>
+                <a:ext uri="{C183D7F6-B498-43B3-948B-1728B52AA6E4}">
+                  <adec:decorative xmlns:adec="http://schemas.microsoft.com/office/drawing/2017/decorative" val="1"/>
+                </a:ext>
+              </a:extLst>
+            </p:cNvPr>
+            <p:cNvCxnSpPr>
+              <a:cxnSpLocks/>
+            </p:cNvCxnSpPr>
+            <p:nvPr>
+              <p:extLst>
+                <p:ext uri="{386F3935-93C4-4BCD-93E2-E3B085C9AB24}">
+                  <p16:designElem xmlns:p16="http://schemas.microsoft.com/office/powerpoint/2015/main" val="1"/>
+                </p:ext>
+              </p:extLst>
+            </p:nvPr>
+          </p:nvCxnSpPr>
+          <p:spPr>
+            <a:xfrm flipH="1">
+              <a:off x="143163" y="5763486"/>
+              <a:ext cx="1" cy="739555"/>
+            </a:xfrm>
+            <a:prstGeom prst="line">
+              <a:avLst/>
+            </a:prstGeom>
+            <a:ln w="177800">
+              <a:solidFill>
+                <a:schemeClr val="accent4"/>
+              </a:solidFill>
+            </a:ln>
+          </p:spPr>
+          <p:style>
+            <a:lnRef idx="1">
+              <a:schemeClr val="accent1"/>
+            </a:lnRef>
+            <a:fillRef idx="0">
+              <a:schemeClr val="accent1"/>
+            </a:fillRef>
+            <a:effectRef idx="0">
+              <a:schemeClr val="accent1"/>
+            </a:effectRef>
+            <a:fontRef idx="minor">
+              <a:schemeClr val="tx1"/>
+            </a:fontRef>
+          </p:style>
+        </p:cxnSp>
+      </p:grpSp>
+      <p:sp>
+        <p:nvSpPr>
+          <p:cNvPr id="25" name="Rectangle 24">
+            <a:extLst>
+              <a:ext uri="{FF2B5EF4-FFF2-40B4-BE49-F238E27FC236}">
+                <a16:creationId xmlns:a16="http://schemas.microsoft.com/office/drawing/2014/main" id="{A6CE366B-6C11-04B8-30A9-A3087D620795}"/>
+              </a:ext>
+              <a:ext uri="{C183D7F6-B498-43B3-948B-1728B52AA6E4}">
+                <adec:decorative xmlns:adec="http://schemas.microsoft.com/office/drawing/2017/decorative" val="1"/>
+              </a:ext>
+            </a:extLst>
+          </p:cNvPr>
+          <p:cNvSpPr>
+            <a:spLocks noGrp="1" noRot="1" noChangeAspect="1" noMove="1" noResize="1" noEditPoints="1" noAdjustHandles="1" noChangeArrowheads="1" noChangeShapeType="1" noTextEdit="1"/>
+          </p:cNvSpPr>
+          <p:nvPr>
+            <p:extLst>
+              <p:ext uri="{386F3935-93C4-4BCD-93E2-E3B085C9AB24}">
+                <p16:designElem xmlns:p16="http://schemas.microsoft.com/office/powerpoint/2015/main" val="1"/>
+              </p:ext>
+            </p:extLst>
+          </p:nvPr>
+        </p:nvSpPr>
+        <p:spPr>
+          <a:xfrm>
+            <a:off x="5133706" y="587829"/>
+            <a:ext cx="6505300" cy="5682342"/>
+          </a:xfrm>
+          <a:prstGeom prst="rect">
+            <a:avLst/>
+          </a:prstGeom>
+          <a:solidFill>
+            <a:schemeClr val="bg1"/>
+          </a:solidFill>
+          <a:ln>
+            <a:noFill/>
+          </a:ln>
+          <a:effectLst>
+            <a:outerShdw blurRad="139700" dist="127000" dir="5400000" algn="t" rotWithShape="0">
+              <a:prstClr val="black">
+                <a:alpha val="15000"/>
+              </a:prstClr>
+            </a:outerShdw>
+          </a:effectLst>
+        </p:spPr>
+        <p:style>
+          <a:lnRef idx="2">
+            <a:schemeClr val="accent1">
+              <a:shade val="50000"/>
+            </a:schemeClr>
+          </a:lnRef>
+          <a:fillRef idx="1">
+            <a:schemeClr val="accent1"/>
+          </a:fillRef>
+          <a:effectRef idx="0">
+            <a:schemeClr val="accent1"/>
+          </a:effectRef>
+          <a:fontRef idx="minor">
+            <a:schemeClr val="lt1"/>
+          </a:fontRef>
+        </p:style>
+        <p:txBody>
+          <a:bodyPr rtlCol="0" anchor="ctr"/>
+          <a:lstStyle/>
+          <a:p>
+            <a:pPr algn="ctr"/>
+            <a:endParaRPr lang="en-US"/>
+          </a:p>
+        </p:txBody>
+      </p:sp>
+      <p:sp>
+        <p:nvSpPr>
+          <p:cNvPr id="11" name="Content Placeholder 10">
+            <a:extLst>
+              <a:ext uri="{FF2B5EF4-FFF2-40B4-BE49-F238E27FC236}">
+                <a16:creationId xmlns:a16="http://schemas.microsoft.com/office/drawing/2014/main" id="{11AAC4A7-8183-C143-790A-4E8DDF57AA19}"/>
+              </a:ext>
+            </a:extLst>
+          </p:cNvPr>
+          <p:cNvSpPr>
+            <a:spLocks noGrp="1"/>
+          </p:cNvSpPr>
+          <p:nvPr>
+            <p:ph idx="1"/>
+          </p:nvPr>
+        </p:nvSpPr>
+        <p:spPr>
+          <a:xfrm>
+            <a:off x="5656218" y="1463039"/>
+            <a:ext cx="5542387" cy="4300447"/>
+          </a:xfrm>
+        </p:spPr>
+        <p:txBody>
+          <a:bodyPr anchor="t">
+            <a:normAutofit/>
+          </a:bodyPr>
+          <a:lstStyle/>
+          <a:p>
+            <a:r>
+              <a:rPr lang="en-US" sz="2200" dirty="0">
+                <a:hlinkClick r:id="rId2"/>
+              </a:rPr>
+              <a:t>https://learn.microsoft.com/en-us/windows-server/virtualization/hyper-v/get-started/install-hyper-v?tabs=powershell&amp;pivots=windows</a:t>
+            </a:r>
+            <a:endParaRPr lang="en-US" sz="2200" dirty="0"/>
+          </a:p>
+          <a:p>
+            <a:endParaRPr lang="en-US" sz="2200" dirty="0"/>
+          </a:p>
+        </p:txBody>
+      </p:sp>
+    </p:spTree>
+    <p:extLst>
+      <p:ext uri="{BB962C8B-B14F-4D97-AF65-F5344CB8AC3E}">
+        <p14:creationId xmlns:p14="http://schemas.microsoft.com/office/powerpoint/2010/main" val="2735028879"/>
+      </p:ext>
+    </p:extLst>
+  </p:cSld>
+  <p:clrMapOvr>
+    <a:masterClrMapping/>
+  </p:clrMapOvr>
+</p:sld>
+</file>
+
+<file path=ppt/slides/slide12.xml><?xml version="1.0" encoding="utf-8"?>
+<p:sld xmlns:a="http://schemas.openxmlformats.org/drawingml/2006/main" xmlns:r="http://schemas.openxmlformats.org/officeDocument/2006/relationships" xmlns:p="http://schemas.openxmlformats.org/presentationml/2006/main">
+  <p:cSld>
+    <p:bg>
+      <p:bgPr>
+        <a:solidFill>
+          <a:schemeClr val="bg1"/>
+        </a:solidFill>
+        <a:effectLst/>
+      </p:bgPr>
+    </p:bg>
+    <p:spTree>
+      <p:nvGrpSpPr>
+        <p:cNvPr id="1" name=""/>
+        <p:cNvGrpSpPr/>
+        <p:nvPr/>
+      </p:nvGrpSpPr>
+      <p:grpSpPr>
+        <a:xfrm>
+          <a:off x="0" y="0"/>
+          <a:ext cx="0" cy="0"/>
+          <a:chOff x="0" y="0"/>
+          <a:chExt cx="0" cy="0"/>
+        </a:xfrm>
+      </p:grpSpPr>
+      <p:sp useBgFill="1">
+        <p:nvSpPr>
+          <p:cNvPr id="8" name="Rectangle 7">
+            <a:extLst>
+              <a:ext uri="{FF2B5EF4-FFF2-40B4-BE49-F238E27FC236}">
+                <a16:creationId xmlns:a16="http://schemas.microsoft.com/office/drawing/2014/main" id="{3AD318CC-E2A8-4E27-9548-A047A78999B1}"/>
+              </a:ext>
+              <a:ext uri="{C183D7F6-B498-43B3-948B-1728B52AA6E4}">
+                <adec:decorative xmlns:adec="http://schemas.microsoft.com/office/drawing/2017/decorative" val="1"/>
+              </a:ext>
+            </a:extLst>
+          </p:cNvPr>
+          <p:cNvSpPr>
+            <a:spLocks noGrp="1" noRot="1" noChangeAspect="1" noMove="1" noResize="1" noEditPoints="1" noAdjustHandles="1" noChangeArrowheads="1" noChangeShapeType="1" noTextEdit="1"/>
+          </p:cNvSpPr>
+          <p:nvPr>
+            <p:extLst>
+              <p:ext uri="{386F3935-93C4-4BCD-93E2-E3B085C9AB24}">
+                <p16:designElem xmlns:p16="http://schemas.microsoft.com/office/powerpoint/2015/main" val="1"/>
+              </p:ext>
+            </p:extLst>
+          </p:nvPr>
+        </p:nvSpPr>
+        <p:spPr>
+          <a:xfrm>
+            <a:off x="0" y="0"/>
+            <a:ext cx="12191999" cy="6857365"/>
+          </a:xfrm>
+          <a:prstGeom prst="rect">
+            <a:avLst/>
+          </a:prstGeom>
+          <a:ln>
+            <a:noFill/>
+          </a:ln>
+        </p:spPr>
+        <p:style>
+          <a:lnRef idx="2">
+            <a:schemeClr val="accent1">
+              <a:shade val="50000"/>
+            </a:schemeClr>
+          </a:lnRef>
+          <a:fillRef idx="1">
+            <a:schemeClr val="accent1"/>
+          </a:fillRef>
+          <a:effectRef idx="0">
+            <a:schemeClr val="accent1"/>
+          </a:effectRef>
+          <a:fontRef idx="minor">
+            <a:schemeClr val="lt1"/>
+          </a:fontRef>
+        </p:style>
+        <p:txBody>
+          <a:bodyPr rtlCol="0" anchor="ctr"/>
+          <a:lstStyle/>
+          <a:p>
+            <a:pPr algn="ctr"/>
+            <a:endParaRPr lang="en-US"/>
+          </a:p>
+        </p:txBody>
+      </p:sp>
+      <p:sp>
+        <p:nvSpPr>
+          <p:cNvPr id="2" name="Title 1">
+            <a:extLst>
+              <a:ext uri="{FF2B5EF4-FFF2-40B4-BE49-F238E27FC236}">
+                <a16:creationId xmlns:a16="http://schemas.microsoft.com/office/drawing/2014/main" id="{8B46D326-F5E1-0DB6-3143-49A73292C5E7}"/>
+              </a:ext>
+            </a:extLst>
+          </p:cNvPr>
+          <p:cNvSpPr>
+            <a:spLocks noGrp="1"/>
+          </p:cNvSpPr>
+          <p:nvPr>
+            <p:ph type="title"/>
+          </p:nvPr>
+        </p:nvSpPr>
+        <p:spPr>
+          <a:xfrm>
+            <a:off x="645065" y="1463040"/>
+            <a:ext cx="3796306" cy="2690949"/>
+          </a:xfrm>
+        </p:spPr>
+        <p:txBody>
+          <a:bodyPr anchor="t">
+            <a:normAutofit/>
+          </a:bodyPr>
+          <a:lstStyle/>
+          <a:p>
+            <a:r>
+              <a:rPr lang="en-IN" sz="4800" dirty="0"/>
+              <a:t>Oracle VM VirtualBox</a:t>
+            </a:r>
+            <a:endParaRPr lang="en-US" sz="4800" dirty="0"/>
+          </a:p>
+        </p:txBody>
+      </p:sp>
+      <p:grpSp>
+        <p:nvGrpSpPr>
+          <p:cNvPr id="10" name="Group 9">
+            <a:extLst>
+              <a:ext uri="{FF2B5EF4-FFF2-40B4-BE49-F238E27FC236}">
+                <a16:creationId xmlns:a16="http://schemas.microsoft.com/office/drawing/2014/main" id="{B14B560F-9DD7-4302-A60B-EBD3EF59B073}"/>
+              </a:ext>
+              <a:ext uri="{C183D7F6-B498-43B3-948B-1728B52AA6E4}">
+                <adec:decorative xmlns:adec="http://schemas.microsoft.com/office/drawing/2017/decorative" val="1"/>
+              </a:ext>
+            </a:extLst>
+          </p:cNvPr>
+          <p:cNvGrpSpPr>
+            <a:grpSpLocks noGrp="1" noUngrp="1" noRot="1" noChangeAspect="1" noMove="1" noResize="1"/>
+          </p:cNvGrpSpPr>
+          <p:nvPr>
+            <p:extLst>
+              <p:ext uri="{386F3935-93C4-4BCD-93E2-E3B085C9AB24}">
+                <p16:designElem xmlns:p16="http://schemas.microsoft.com/office/powerpoint/2015/main" val="1"/>
+              </p:ext>
+            </p:extLst>
+          </p:nvPr>
+        </p:nvGrpSpPr>
+        <p:grpSpPr>
+          <a:xfrm>
+            <a:off x="209667" y="4415246"/>
+            <a:ext cx="11982332" cy="2087795"/>
+            <a:chOff x="143163" y="5763486"/>
+            <a:chExt cx="11982332" cy="739555"/>
+          </a:xfrm>
+        </p:grpSpPr>
+        <p:sp>
+          <p:nvSpPr>
+            <p:cNvPr id="11" name="Rectangle 10">
+              <a:extLst>
+                <a:ext uri="{FF2B5EF4-FFF2-40B4-BE49-F238E27FC236}">
+                  <a16:creationId xmlns:a16="http://schemas.microsoft.com/office/drawing/2014/main" id="{3A9A4357-BD1D-4622-A4FE-766E6AB8DE84}"/>
+                </a:ext>
+                <a:ext uri="{C183D7F6-B498-43B3-948B-1728B52AA6E4}">
+                  <adec:decorative xmlns:adec="http://schemas.microsoft.com/office/drawing/2017/decorative" val="1"/>
+                </a:ext>
+              </a:extLst>
+            </p:cNvPr>
+            <p:cNvSpPr/>
+            <p:nvPr>
+              <p:extLst>
+                <p:ext uri="{386F3935-93C4-4BCD-93E2-E3B085C9AB24}">
+                  <p16:designElem xmlns:p16="http://schemas.microsoft.com/office/powerpoint/2015/main" val="1"/>
+                </p:ext>
+              </p:extLst>
+            </p:nvPr>
+          </p:nvSpPr>
+          <p:spPr>
+            <a:xfrm flipH="1" flipV="1">
+              <a:off x="357444" y="5763486"/>
+              <a:ext cx="11768051" cy="739555"/>
+            </a:xfrm>
+            <a:prstGeom prst="rect">
+              <a:avLst/>
+            </a:prstGeom>
+            <a:solidFill>
+              <a:schemeClr val="accent4"/>
+            </a:solidFill>
+            <a:ln>
+              <a:noFill/>
+            </a:ln>
+          </p:spPr>
+          <p:style>
+            <a:lnRef idx="2">
+              <a:schemeClr val="accent1">
+                <a:shade val="50000"/>
+              </a:schemeClr>
+            </a:lnRef>
+            <a:fillRef idx="1">
+              <a:schemeClr val="accent1"/>
+            </a:fillRef>
+            <a:effectRef idx="0">
+              <a:schemeClr val="accent1"/>
+            </a:effectRef>
+            <a:fontRef idx="minor">
+              <a:schemeClr val="lt1"/>
+            </a:fontRef>
+          </p:style>
+          <p:txBody>
+            <a:bodyPr rtlCol="0" anchor="ctr"/>
+            <a:lstStyle/>
+            <a:p>
+              <a:pPr algn="ctr"/>
+              <a:endParaRPr lang="en-US"/>
+            </a:p>
+          </p:txBody>
+        </p:sp>
+        <p:cxnSp>
+          <p:nvCxnSpPr>
+            <p:cNvPr id="12" name="Straight Connector 11">
+              <a:extLst>
+                <a:ext uri="{FF2B5EF4-FFF2-40B4-BE49-F238E27FC236}">
+                  <a16:creationId xmlns:a16="http://schemas.microsoft.com/office/drawing/2014/main" id="{C21D6966-343E-49AC-A026-D2497E0C3CA1}"/>
+                </a:ext>
+                <a:ext uri="{C183D7F6-B498-43B3-948B-1728B52AA6E4}">
+                  <adec:decorative xmlns:adec="http://schemas.microsoft.com/office/drawing/2017/decorative" val="1"/>
+                </a:ext>
+              </a:extLst>
+            </p:cNvPr>
+            <p:cNvCxnSpPr>
+              <a:cxnSpLocks/>
+            </p:cNvCxnSpPr>
+            <p:nvPr>
+              <p:extLst>
+                <p:ext uri="{386F3935-93C4-4BCD-93E2-E3B085C9AB24}">
+                  <p16:designElem xmlns:p16="http://schemas.microsoft.com/office/powerpoint/2015/main" val="1"/>
+                </p:ext>
+              </p:extLst>
+            </p:nvPr>
+          </p:nvCxnSpPr>
+          <p:spPr>
+            <a:xfrm flipH="1">
+              <a:off x="143163" y="5763486"/>
+              <a:ext cx="1" cy="739555"/>
+            </a:xfrm>
+            <a:prstGeom prst="line">
+              <a:avLst/>
+            </a:prstGeom>
+            <a:ln w="177800">
+              <a:solidFill>
+                <a:schemeClr val="accent4"/>
+              </a:solidFill>
+            </a:ln>
+          </p:spPr>
+          <p:style>
+            <a:lnRef idx="1">
+              <a:schemeClr val="accent1"/>
+            </a:lnRef>
+            <a:fillRef idx="0">
+              <a:schemeClr val="accent1"/>
+            </a:fillRef>
+            <a:effectRef idx="0">
+              <a:schemeClr val="accent1"/>
+            </a:effectRef>
+            <a:fontRef idx="minor">
+              <a:schemeClr val="tx1"/>
+            </a:fontRef>
+          </p:style>
+        </p:cxnSp>
+      </p:grpSp>
+      <p:sp>
+        <p:nvSpPr>
+          <p:cNvPr id="14" name="Rectangle 13">
+            <a:extLst>
+              <a:ext uri="{FF2B5EF4-FFF2-40B4-BE49-F238E27FC236}">
+                <a16:creationId xmlns:a16="http://schemas.microsoft.com/office/drawing/2014/main" id="{2C1BBA94-3F40-40AA-8BB9-E69E25E537C1}"/>
+              </a:ext>
+              <a:ext uri="{C183D7F6-B498-43B3-948B-1728B52AA6E4}">
+                <adec:decorative xmlns:adec="http://schemas.microsoft.com/office/drawing/2017/decorative" val="1"/>
+              </a:ext>
+            </a:extLst>
+          </p:cNvPr>
+          <p:cNvSpPr>
+            <a:spLocks noGrp="1" noRot="1" noChangeAspect="1" noMove="1" noResize="1" noEditPoints="1" noAdjustHandles="1" noChangeArrowheads="1" noChangeShapeType="1" noTextEdit="1"/>
+          </p:cNvSpPr>
+          <p:nvPr>
+            <p:extLst>
+              <p:ext uri="{386F3935-93C4-4BCD-93E2-E3B085C9AB24}">
+                <p16:designElem xmlns:p16="http://schemas.microsoft.com/office/powerpoint/2015/main" val="1"/>
+              </p:ext>
+            </p:extLst>
+          </p:nvPr>
+        </p:nvSpPr>
+        <p:spPr>
+          <a:xfrm>
+            <a:off x="5133706" y="587829"/>
+            <a:ext cx="6505300" cy="5682342"/>
+          </a:xfrm>
+          <a:prstGeom prst="rect">
+            <a:avLst/>
+          </a:prstGeom>
+          <a:solidFill>
+            <a:schemeClr val="bg1"/>
+          </a:solidFill>
+          <a:ln>
+            <a:noFill/>
+          </a:ln>
+          <a:effectLst>
+            <a:outerShdw blurRad="139700" dist="127000" dir="5400000" algn="t" rotWithShape="0">
+              <a:prstClr val="black">
+                <a:alpha val="15000"/>
+              </a:prstClr>
+            </a:outerShdw>
+          </a:effectLst>
+        </p:spPr>
+        <p:style>
+          <a:lnRef idx="2">
+            <a:schemeClr val="accent1">
+              <a:shade val="50000"/>
+            </a:schemeClr>
+          </a:lnRef>
+          <a:fillRef idx="1">
+            <a:schemeClr val="accent1"/>
+          </a:fillRef>
+          <a:effectRef idx="0">
+            <a:schemeClr val="accent1"/>
+          </a:effectRef>
+          <a:fontRef idx="minor">
+            <a:schemeClr val="lt1"/>
+          </a:fontRef>
+        </p:style>
+        <p:txBody>
+          <a:bodyPr rtlCol="0" anchor="ctr"/>
+          <a:lstStyle/>
+          <a:p>
+            <a:pPr algn="ctr"/>
+            <a:endParaRPr lang="en-US"/>
+          </a:p>
+        </p:txBody>
+      </p:sp>
+      <p:sp>
+        <p:nvSpPr>
+          <p:cNvPr id="3" name="Content Placeholder 2">
+            <a:extLst>
+              <a:ext uri="{FF2B5EF4-FFF2-40B4-BE49-F238E27FC236}">
+                <a16:creationId xmlns:a16="http://schemas.microsoft.com/office/drawing/2014/main" id="{9521A2D3-4BB3-85AD-9D9A-F707CDD28774}"/>
+              </a:ext>
+            </a:extLst>
+          </p:cNvPr>
+          <p:cNvSpPr>
+            <a:spLocks noGrp="1"/>
+          </p:cNvSpPr>
+          <p:nvPr>
+            <p:ph idx="1"/>
+          </p:nvPr>
+        </p:nvSpPr>
+        <p:spPr>
+          <a:xfrm>
+            <a:off x="5656218" y="1463039"/>
+            <a:ext cx="5542387" cy="4300447"/>
+          </a:xfrm>
+        </p:spPr>
+        <p:txBody>
+          <a:bodyPr anchor="t">
+            <a:normAutofit/>
+          </a:bodyPr>
+          <a:lstStyle/>
+          <a:p>
+            <a:r>
+              <a:rPr lang="en-US" sz="2200"/>
+              <a:t>https://www.oracle.com/in/a/ocom/docs/dc/em/oracle-vm-virtualbox-overview-2981353.pdf</a:t>
+            </a:r>
+          </a:p>
+        </p:txBody>
+      </p:sp>
+    </p:spTree>
+    <p:extLst>
+      <p:ext uri="{BB962C8B-B14F-4D97-AF65-F5344CB8AC3E}">
+        <p14:creationId xmlns:p14="http://schemas.microsoft.com/office/powerpoint/2010/main" val="2362534666"/>
+      </p:ext>
+    </p:extLst>
+  </p:cSld>
+  <p:clrMapOvr>
+    <a:masterClrMapping/>
+  </p:clrMapOvr>
+  <p:timing>
+    <p:tnLst>
+      <p:par>
+        <p:cTn id="1" dur="indefinite" restart="never" nodeType="tmRoot">
+          <p:childTnLst>
+            <p:seq concurrent="1" nextAc="seek">
+              <p:cTn id="2" dur="indefinite" nodeType="mainSeq">
+                <p:childTnLst>
+                  <p:par>
+                    <p:cTn id="3" fill="hold">
+                      <p:stCondLst>
+                        <p:cond delay="indefinite"/>
+                        <p:cond evt="onBegin" delay="0">
+                          <p:tn val="2"/>
+                        </p:cond>
+                      </p:stCondLst>
+                      <p:childTnLst>
+                        <p:par>
+                          <p:cTn id="4" fill="hold">
+                            <p:stCondLst>
+                              <p:cond delay="0"/>
+                            </p:stCondLst>
+                            <p:childTnLst>
+                              <p:par>
+                                <p:cTn id="5" presetID="10" presetClass="entr" presetSubtype="0" fill="hold" grpId="0" nodeType="withEffect">
+                                  <p:stCondLst>
+                                    <p:cond delay="500"/>
+                                  </p:stCondLst>
+                                  <p:iterate type="wd">
+                                    <p:tmPct val="15000"/>
+                                  </p:iterate>
+                                  <p:childTnLst>
+                                    <p:set>
+                                      <p:cBhvr>
+                                        <p:cTn id="6" dur="1" fill="hold">
+                                          <p:stCondLst>
+                                            <p:cond delay="0"/>
+                                          </p:stCondLst>
+                                        </p:cTn>
+                                        <p:tgtEl>
+                                          <p:spTgt spid="2"/>
+                                        </p:tgtEl>
+                                        <p:attrNameLst>
+                                          <p:attrName>style.visibility</p:attrName>
+                                        </p:attrNameLst>
+                                      </p:cBhvr>
+                                      <p:to>
+                                        <p:strVal val="visible"/>
+                                      </p:to>
+                                    </p:set>
+                                    <p:animEffect transition="in" filter="fade">
+                                      <p:cBhvr>
+                                        <p:cTn id="7" dur="1000"/>
+                                        <p:tgtEl>
+                                          <p:spTgt spid="2"/>
+                                        </p:tgtEl>
+                                      </p:cBhvr>
+                                    </p:animEffect>
+                                  </p:childTnLst>
+                                </p:cTn>
+                              </p:par>
+                            </p:childTnLst>
+                          </p:cTn>
+                        </p:par>
+                      </p:childTnLst>
+                    </p:cTn>
+                  </p:par>
+                </p:childTnLst>
+              </p:cTn>
+              <p:prevCondLst>
+                <p:cond evt="onPrev" delay="0">
+                  <p:tgtEl>
+                    <p:sldTgt/>
+                  </p:tgtEl>
+                </p:cond>
+              </p:prevCondLst>
+              <p:nextCondLst>
+                <p:cond evt="onNext" delay="0">
+                  <p:tgtEl>
+                    <p:sldTgt/>
+                  </p:tgtEl>
+                </p:cond>
+              </p:nextCondLst>
+            </p:seq>
+          </p:childTnLst>
+        </p:cTn>
+      </p:par>
+    </p:tnLst>
+    <p:bldLst>
+      <p:bldP spid="2" grpId="0"/>
+    </p:bldLst>
+  </p:timing>
+</p:sld>
+</file>
+
+<file path=ppt/slides/slide13.xml><?xml version="1.0" encoding="utf-8"?>
+<p:sld xmlns:a="http://schemas.openxmlformats.org/drawingml/2006/main" xmlns:r="http://schemas.openxmlformats.org/officeDocument/2006/relationships" xmlns:p="http://schemas.openxmlformats.org/presentationml/2006/main">
+  <p:cSld>
+    <p:bg>
+      <p:bgPr>
+        <a:solidFill>
+          <a:schemeClr val="bg1"/>
+        </a:solidFill>
+        <a:effectLst/>
+      </p:bgPr>
+    </p:bg>
+    <p:spTree>
+      <p:nvGrpSpPr>
+        <p:cNvPr id="1" name="">
+          <a:extLst>
+            <a:ext uri="{FF2B5EF4-FFF2-40B4-BE49-F238E27FC236}">
+              <a16:creationId xmlns:a16="http://schemas.microsoft.com/office/drawing/2014/main" id="{143AD0BC-CACA-7025-10A6-6FF736232DE1}"/>
+            </a:ext>
+          </a:extLst>
+        </p:cNvPr>
+        <p:cNvGrpSpPr/>
+        <p:nvPr/>
+      </p:nvGrpSpPr>
+      <p:grpSpPr>
+        <a:xfrm>
+          <a:off x="0" y="0"/>
+          <a:ext cx="0" cy="0"/>
+          <a:chOff x="0" y="0"/>
+          <a:chExt cx="0" cy="0"/>
+        </a:xfrm>
+      </p:grpSpPr>
+      <p:sp useBgFill="1">
+        <p:nvSpPr>
+          <p:cNvPr id="8" name="Rectangle 7">
+            <a:extLst>
+              <a:ext uri="{FF2B5EF4-FFF2-40B4-BE49-F238E27FC236}">
+                <a16:creationId xmlns:a16="http://schemas.microsoft.com/office/drawing/2014/main" id="{F752B426-7133-679D-82BA-0C90CACC4A4B}"/>
+              </a:ext>
+              <a:ext uri="{C183D7F6-B498-43B3-948B-1728B52AA6E4}">
+                <adec:decorative xmlns:adec="http://schemas.microsoft.com/office/drawing/2017/decorative" val="1"/>
+              </a:ext>
+            </a:extLst>
+          </p:cNvPr>
+          <p:cNvSpPr>
+            <a:spLocks noGrp="1" noRot="1" noChangeAspect="1" noMove="1" noResize="1" noEditPoints="1" noAdjustHandles="1" noChangeArrowheads="1" noChangeShapeType="1" noTextEdit="1"/>
+          </p:cNvSpPr>
+          <p:nvPr>
+            <p:extLst>
+              <p:ext uri="{386F3935-93C4-4BCD-93E2-E3B085C9AB24}">
+                <p16:designElem xmlns:p16="http://schemas.microsoft.com/office/powerpoint/2015/main" val="1"/>
+              </p:ext>
+            </p:extLst>
+          </p:nvPr>
+        </p:nvSpPr>
+        <p:spPr>
+          <a:xfrm>
+            <a:off x="0" y="0"/>
+            <a:ext cx="12191999" cy="6857365"/>
+          </a:xfrm>
+          <a:prstGeom prst="rect">
+            <a:avLst/>
+          </a:prstGeom>
+          <a:ln>
+            <a:noFill/>
+          </a:ln>
+        </p:spPr>
+        <p:style>
+          <a:lnRef idx="2">
+            <a:schemeClr val="accent1">
+              <a:shade val="50000"/>
+            </a:schemeClr>
+          </a:lnRef>
+          <a:fillRef idx="1">
+            <a:schemeClr val="accent1"/>
+          </a:fillRef>
+          <a:effectRef idx="0">
+            <a:schemeClr val="accent1"/>
+          </a:effectRef>
+          <a:fontRef idx="minor">
+            <a:schemeClr val="lt1"/>
+          </a:fontRef>
+        </p:style>
+        <p:txBody>
+          <a:bodyPr rtlCol="0" anchor="ctr"/>
+          <a:lstStyle/>
+          <a:p>
+            <a:pPr algn="ctr"/>
+            <a:endParaRPr lang="en-US"/>
+          </a:p>
+        </p:txBody>
+      </p:sp>
+      <p:sp>
+        <p:nvSpPr>
+          <p:cNvPr id="2" name="Title 1">
+            <a:extLst>
+              <a:ext uri="{FF2B5EF4-FFF2-40B4-BE49-F238E27FC236}">
+                <a16:creationId xmlns:a16="http://schemas.microsoft.com/office/drawing/2014/main" id="{46583B6E-7A96-FEF7-48E9-469DE0BC4457}"/>
+              </a:ext>
+            </a:extLst>
+          </p:cNvPr>
+          <p:cNvSpPr>
+            <a:spLocks noGrp="1"/>
+          </p:cNvSpPr>
+          <p:nvPr>
+            <p:ph type="title"/>
+          </p:nvPr>
+        </p:nvSpPr>
+        <p:spPr>
+          <a:xfrm>
+            <a:off x="645065" y="1463040"/>
+            <a:ext cx="3796306" cy="2690949"/>
+          </a:xfrm>
+        </p:spPr>
+        <p:txBody>
+          <a:bodyPr anchor="t">
+            <a:normAutofit/>
+          </a:bodyPr>
+          <a:lstStyle/>
+          <a:p>
+            <a:r>
+              <a:rPr lang="en-IN" sz="4800" dirty="0"/>
+              <a:t>Citrix</a:t>
+            </a:r>
+            <a:br>
+              <a:rPr lang="en-IN" sz="4800" dirty="0"/>
+            </a:br>
+            <a:r>
+              <a:rPr lang="en-IN" dirty="0" err="1"/>
+              <a:t>XenServer</a:t>
+            </a:r>
+            <a:endParaRPr lang="en-US" sz="4800" dirty="0"/>
+          </a:p>
+        </p:txBody>
+      </p:sp>
+      <p:grpSp>
+        <p:nvGrpSpPr>
+          <p:cNvPr id="10" name="Group 9">
+            <a:extLst>
+              <a:ext uri="{FF2B5EF4-FFF2-40B4-BE49-F238E27FC236}">
+                <a16:creationId xmlns:a16="http://schemas.microsoft.com/office/drawing/2014/main" id="{5FB98EC9-B638-EEBF-ECA9-CC4008F53988}"/>
+              </a:ext>
+              <a:ext uri="{C183D7F6-B498-43B3-948B-1728B52AA6E4}">
+                <adec:decorative xmlns:adec="http://schemas.microsoft.com/office/drawing/2017/decorative" val="1"/>
+              </a:ext>
+            </a:extLst>
+          </p:cNvPr>
+          <p:cNvGrpSpPr>
+            <a:grpSpLocks noGrp="1" noUngrp="1" noRot="1" noChangeAspect="1" noMove="1" noResize="1"/>
+          </p:cNvGrpSpPr>
+          <p:nvPr>
+            <p:extLst>
+              <p:ext uri="{386F3935-93C4-4BCD-93E2-E3B085C9AB24}">
+                <p16:designElem xmlns:p16="http://schemas.microsoft.com/office/powerpoint/2015/main" val="1"/>
+              </p:ext>
+            </p:extLst>
+          </p:nvPr>
+        </p:nvGrpSpPr>
+        <p:grpSpPr>
+          <a:xfrm>
+            <a:off x="209667" y="4415246"/>
+            <a:ext cx="11982332" cy="2087795"/>
+            <a:chOff x="143163" y="5763486"/>
+            <a:chExt cx="11982332" cy="739555"/>
+          </a:xfrm>
+        </p:grpSpPr>
+        <p:sp>
+          <p:nvSpPr>
+            <p:cNvPr id="11" name="Rectangle 10">
+              <a:extLst>
+                <a:ext uri="{FF2B5EF4-FFF2-40B4-BE49-F238E27FC236}">
+                  <a16:creationId xmlns:a16="http://schemas.microsoft.com/office/drawing/2014/main" id="{50527F1C-362C-B353-779E-D252C8A0CC68}"/>
+                </a:ext>
+                <a:ext uri="{C183D7F6-B498-43B3-948B-1728B52AA6E4}">
+                  <adec:decorative xmlns:adec="http://schemas.microsoft.com/office/drawing/2017/decorative" val="1"/>
+                </a:ext>
+              </a:extLst>
+            </p:cNvPr>
+            <p:cNvSpPr/>
+            <p:nvPr>
+              <p:extLst>
+                <p:ext uri="{386F3935-93C4-4BCD-93E2-E3B085C9AB24}">
+                  <p16:designElem xmlns:p16="http://schemas.microsoft.com/office/powerpoint/2015/main" val="1"/>
+                </p:ext>
+              </p:extLst>
+            </p:nvPr>
+          </p:nvSpPr>
+          <p:spPr>
+            <a:xfrm flipH="1" flipV="1">
+              <a:off x="357444" y="5763486"/>
+              <a:ext cx="11768051" cy="739555"/>
+            </a:xfrm>
+            <a:prstGeom prst="rect">
+              <a:avLst/>
+            </a:prstGeom>
+            <a:solidFill>
+              <a:schemeClr val="accent4"/>
+            </a:solidFill>
+            <a:ln>
+              <a:noFill/>
+            </a:ln>
+          </p:spPr>
+          <p:style>
+            <a:lnRef idx="2">
+              <a:schemeClr val="accent1">
+                <a:shade val="50000"/>
+              </a:schemeClr>
+            </a:lnRef>
+            <a:fillRef idx="1">
+              <a:schemeClr val="accent1"/>
+            </a:fillRef>
+            <a:effectRef idx="0">
+              <a:schemeClr val="accent1"/>
+            </a:effectRef>
+            <a:fontRef idx="minor">
+              <a:schemeClr val="lt1"/>
+            </a:fontRef>
+          </p:style>
+          <p:txBody>
+            <a:bodyPr rtlCol="0" anchor="ctr"/>
+            <a:lstStyle/>
+            <a:p>
+              <a:pPr algn="ctr"/>
+              <a:endParaRPr lang="en-US"/>
+            </a:p>
+          </p:txBody>
+        </p:sp>
+        <p:cxnSp>
+          <p:nvCxnSpPr>
+            <p:cNvPr id="12" name="Straight Connector 11">
+              <a:extLst>
+                <a:ext uri="{FF2B5EF4-FFF2-40B4-BE49-F238E27FC236}">
+                  <a16:creationId xmlns:a16="http://schemas.microsoft.com/office/drawing/2014/main" id="{B5EB7027-AE1B-F5C0-31F4-4B66EB359A68}"/>
+                </a:ext>
+                <a:ext uri="{C183D7F6-B498-43B3-948B-1728B52AA6E4}">
+                  <adec:decorative xmlns:adec="http://schemas.microsoft.com/office/drawing/2017/decorative" val="1"/>
+                </a:ext>
+              </a:extLst>
+            </p:cNvPr>
+            <p:cNvCxnSpPr>
+              <a:cxnSpLocks/>
+            </p:cNvCxnSpPr>
+            <p:nvPr>
+              <p:extLst>
+                <p:ext uri="{386F3935-93C4-4BCD-93E2-E3B085C9AB24}">
+                  <p16:designElem xmlns:p16="http://schemas.microsoft.com/office/powerpoint/2015/main" val="1"/>
+                </p:ext>
+              </p:extLst>
+            </p:nvPr>
+          </p:nvCxnSpPr>
+          <p:spPr>
+            <a:xfrm flipH="1">
+              <a:off x="143163" y="5763486"/>
+              <a:ext cx="1" cy="739555"/>
+            </a:xfrm>
+            <a:prstGeom prst="line">
+              <a:avLst/>
+            </a:prstGeom>
+            <a:ln w="177800">
+              <a:solidFill>
+                <a:schemeClr val="accent4"/>
+              </a:solidFill>
+            </a:ln>
+          </p:spPr>
+          <p:style>
+            <a:lnRef idx="1">
+              <a:schemeClr val="accent1"/>
+            </a:lnRef>
+            <a:fillRef idx="0">
+              <a:schemeClr val="accent1"/>
+            </a:fillRef>
+            <a:effectRef idx="0">
+              <a:schemeClr val="accent1"/>
+            </a:effectRef>
+            <a:fontRef idx="minor">
+              <a:schemeClr val="tx1"/>
+            </a:fontRef>
+          </p:style>
+        </p:cxnSp>
+      </p:grpSp>
+      <p:sp>
+        <p:nvSpPr>
+          <p:cNvPr id="14" name="Rectangle 13">
+            <a:extLst>
+              <a:ext uri="{FF2B5EF4-FFF2-40B4-BE49-F238E27FC236}">
+                <a16:creationId xmlns:a16="http://schemas.microsoft.com/office/drawing/2014/main" id="{052B6151-3A43-54A3-117E-D64FEC2BDD0F}"/>
+              </a:ext>
+              <a:ext uri="{C183D7F6-B498-43B3-948B-1728B52AA6E4}">
+                <adec:decorative xmlns:adec="http://schemas.microsoft.com/office/drawing/2017/decorative" val="1"/>
+              </a:ext>
+            </a:extLst>
+          </p:cNvPr>
+          <p:cNvSpPr>
+            <a:spLocks noGrp="1" noRot="1" noChangeAspect="1" noMove="1" noResize="1" noEditPoints="1" noAdjustHandles="1" noChangeArrowheads="1" noChangeShapeType="1" noTextEdit="1"/>
+          </p:cNvSpPr>
+          <p:nvPr>
+            <p:extLst>
+              <p:ext uri="{386F3935-93C4-4BCD-93E2-E3B085C9AB24}">
+                <p16:designElem xmlns:p16="http://schemas.microsoft.com/office/powerpoint/2015/main" val="1"/>
+              </p:ext>
+            </p:extLst>
+          </p:nvPr>
+        </p:nvSpPr>
+        <p:spPr>
+          <a:xfrm>
+            <a:off x="5133706" y="587829"/>
+            <a:ext cx="6505300" cy="5682342"/>
+          </a:xfrm>
+          <a:prstGeom prst="rect">
+            <a:avLst/>
+          </a:prstGeom>
+          <a:solidFill>
+            <a:schemeClr val="bg1"/>
+          </a:solidFill>
+          <a:ln>
+            <a:noFill/>
+          </a:ln>
+          <a:effectLst>
+            <a:outerShdw blurRad="139700" dist="127000" dir="5400000" algn="t" rotWithShape="0">
+              <a:prstClr val="black">
+                <a:alpha val="15000"/>
+              </a:prstClr>
+            </a:outerShdw>
+          </a:effectLst>
+        </p:spPr>
+        <p:style>
+          <a:lnRef idx="2">
+            <a:schemeClr val="accent1">
+              <a:shade val="50000"/>
+            </a:schemeClr>
+          </a:lnRef>
+          <a:fillRef idx="1">
+            <a:schemeClr val="accent1"/>
+          </a:fillRef>
+          <a:effectRef idx="0">
+            <a:schemeClr val="accent1"/>
+          </a:effectRef>
+          <a:fontRef idx="minor">
+            <a:schemeClr val="lt1"/>
+          </a:fontRef>
+        </p:style>
+        <p:txBody>
+          <a:bodyPr rtlCol="0" anchor="ctr"/>
+          <a:lstStyle/>
+          <a:p>
+            <a:pPr algn="ctr"/>
+            <a:endParaRPr lang="en-US"/>
+          </a:p>
+        </p:txBody>
+      </p:sp>
+      <p:sp>
+        <p:nvSpPr>
+          <p:cNvPr id="3" name="Content Placeholder 2">
+            <a:extLst>
+              <a:ext uri="{FF2B5EF4-FFF2-40B4-BE49-F238E27FC236}">
+                <a16:creationId xmlns:a16="http://schemas.microsoft.com/office/drawing/2014/main" id="{78809420-FF5E-EE3F-8EB6-CB4049958F20}"/>
+              </a:ext>
+            </a:extLst>
+          </p:cNvPr>
+          <p:cNvSpPr>
+            <a:spLocks noGrp="1"/>
+          </p:cNvSpPr>
+          <p:nvPr>
+            <p:ph idx="1"/>
+          </p:nvPr>
+        </p:nvSpPr>
+        <p:spPr>
+          <a:xfrm>
+            <a:off x="5656218" y="1463039"/>
+            <a:ext cx="5542387" cy="4300447"/>
+          </a:xfrm>
+        </p:spPr>
+        <p:txBody>
+          <a:bodyPr anchor="t">
+            <a:normAutofit/>
+          </a:bodyPr>
+          <a:lstStyle/>
+          <a:p>
+            <a:r>
+              <a:rPr lang="en-US" sz="2200" dirty="0"/>
+              <a:t>https://</a:t>
+            </a:r>
+            <a:r>
+              <a:rPr lang="en-US" sz="2200" dirty="0" err="1"/>
+              <a:t>docs.xenserver.com</a:t>
+            </a:r>
+            <a:r>
+              <a:rPr lang="en-US" sz="2200" dirty="0"/>
+              <a:t>/</a:t>
+            </a:r>
+            <a:r>
+              <a:rPr lang="en-US" sz="2200" dirty="0" err="1"/>
+              <a:t>en</a:t>
+            </a:r>
+            <a:r>
+              <a:rPr lang="en-US" sz="2200" dirty="0"/>
+              <a:t>-us/</a:t>
+            </a:r>
+            <a:r>
+              <a:rPr lang="en-US" sz="2200" dirty="0" err="1"/>
+              <a:t>xenserver</a:t>
+            </a:r>
+            <a:r>
+              <a:rPr lang="en-US" sz="2200" dirty="0"/>
+              <a:t>/9/technical-overview</a:t>
+            </a:r>
+          </a:p>
+        </p:txBody>
+      </p:sp>
+    </p:spTree>
+    <p:extLst>
+      <p:ext uri="{BB962C8B-B14F-4D97-AF65-F5344CB8AC3E}">
+        <p14:creationId xmlns:p14="http://schemas.microsoft.com/office/powerpoint/2010/main" val="860190305"/>
+      </p:ext>
+    </p:extLst>
+  </p:cSld>
+  <p:clrMapOvr>
+    <a:masterClrMapping/>
+  </p:clrMapOvr>
+  <p:timing>
+    <p:tnLst>
+      <p:par>
+        <p:cTn id="1" dur="indefinite" restart="never" nodeType="tmRoot">
+          <p:childTnLst>
+            <p:seq concurrent="1" nextAc="seek">
+              <p:cTn id="2" dur="indefinite" nodeType="mainSeq">
+                <p:childTnLst>
+                  <p:par>
+                    <p:cTn id="3" fill="hold">
+                      <p:stCondLst>
+                        <p:cond delay="indefinite"/>
+                        <p:cond evt="onBegin" delay="0">
+                          <p:tn val="2"/>
+                        </p:cond>
+                      </p:stCondLst>
+                      <p:childTnLst>
+                        <p:par>
+                          <p:cTn id="4" fill="hold">
+                            <p:stCondLst>
+                              <p:cond delay="0"/>
+                            </p:stCondLst>
+                            <p:childTnLst>
+                              <p:par>
+                                <p:cTn id="5" presetID="10" presetClass="entr" presetSubtype="0" fill="hold" grpId="0" nodeType="withEffect">
+                                  <p:stCondLst>
+                                    <p:cond delay="500"/>
+                                  </p:stCondLst>
+                                  <p:iterate type="wd">
+                                    <p:tmPct val="15000"/>
+                                  </p:iterate>
+                                  <p:childTnLst>
+                                    <p:set>
+                                      <p:cBhvr>
+                                        <p:cTn id="6" dur="1" fill="hold">
+                                          <p:stCondLst>
+                                            <p:cond delay="0"/>
+                                          </p:stCondLst>
+                                        </p:cTn>
+                                        <p:tgtEl>
+                                          <p:spTgt spid="2"/>
+                                        </p:tgtEl>
+                                        <p:attrNameLst>
+                                          <p:attrName>style.visibility</p:attrName>
+                                        </p:attrNameLst>
+                                      </p:cBhvr>
+                                      <p:to>
+                                        <p:strVal val="visible"/>
+                                      </p:to>
+                                    </p:set>
+                                    <p:animEffect transition="in" filter="fade">
+                                      <p:cBhvr>
+                                        <p:cTn id="7" dur="1000"/>
+                                        <p:tgtEl>
+                                          <p:spTgt spid="2"/>
+                                        </p:tgtEl>
+                                      </p:cBhvr>
+                                    </p:animEffect>
+                                  </p:childTnLst>
+                                </p:cTn>
+                              </p:par>
+                            </p:childTnLst>
+                          </p:cTn>
+                        </p:par>
+                      </p:childTnLst>
+                    </p:cTn>
+                  </p:par>
+                </p:childTnLst>
+              </p:cTn>
+              <p:prevCondLst>
+                <p:cond evt="onPrev" delay="0">
+                  <p:tgtEl>
+                    <p:sldTgt/>
+                  </p:tgtEl>
+                </p:cond>
+              </p:prevCondLst>
+              <p:nextCondLst>
+                <p:cond evt="onNext" delay="0">
+                  <p:tgtEl>
+                    <p:sldTgt/>
+                  </p:tgtEl>
+                </p:cond>
+              </p:nextCondLst>
+            </p:seq>
+          </p:childTnLst>
+        </p:cTn>
+      </p:par>
+    </p:tnLst>
+    <p:bldLst>
+      <p:bldP spid="2" grpId="0"/>
+    </p:bldLst>
+  </p:timing>
+</p:sld>
+</file>
+
 <file path=ppt/slides/slide2.xml><?xml version="1.0" encoding="utf-8"?>
 <p:sld xmlns:a="http://schemas.openxmlformats.org/drawingml/2006/main" xmlns:r="http://schemas.openxmlformats.org/officeDocument/2006/relationships" xmlns:p="http://schemas.openxmlformats.org/presentationml/2006/main">
   <p:cSld>
@@ -13696,10 +15586,10 @@
           <a:lstStyle/>
           <a:p>
             <a:r>
-              <a:rPr lang="en-IN" sz="4800"/>
+              <a:rPr lang="en-IN" sz="4800" dirty="0"/>
               <a:t>Features of VMware ESX Server</a:t>
             </a:r>
-            <a:endParaRPr lang="en-US" sz="4800"/>
+            <a:endParaRPr lang="en-US" sz="4800" dirty="0"/>
           </a:p>
         </p:txBody>
       </p:sp>
@@ -14565,6 +16455,7 @@
           </a:bodyPr>
           <a:lstStyle/>
           <a:p>
+            <a:pPr algn="just"/>
             <a:r>
               <a:rPr lang="en-IN" sz="1800" dirty="0">
                 <a:latin typeface="Times New Roman" panose="02020603050405020304" pitchFamily="18" charset="0"/>
@@ -14574,6 +16465,7 @@
             </a:r>
           </a:p>
           <a:p>
+            <a:pPr algn="just"/>
             <a:r>
               <a:rPr lang="en-IN" sz="1800" dirty="0">
                 <a:latin typeface="Times New Roman" panose="02020603050405020304" pitchFamily="18" charset="0"/>
@@ -15143,6 +17035,7 @@
           </a:bodyPr>
           <a:lstStyle/>
           <a:p>
+            <a:pPr algn="just"/>
             <a:r>
               <a:rPr lang="en-IN" sz="1800" dirty="0">
                 <a:latin typeface="Times New Roman" panose="02020603050405020304" pitchFamily="18" charset="0"/>
